--- a/API/L01-4-API-Financial/4_API_polygon_io.pptx
+++ b/API/L01-4-API-Financial/4_API_polygon_io.pptx
@@ -218,7 +218,7 @@
           <a:p>
             <a:fld id="{7BAEECA8-D063-486F-AE31-5020270C1449}" type="datetimeFigureOut">
               <a:rPr lang="en-US" smtClean="0"/>
-              <a:t>5/30/2026</a:t>
+              <a:t>6/3/2026</a:t>
             </a:fld>
             <a:endParaRPr lang="en-US"/>
           </a:p>
@@ -563,7 +563,7 @@
           <a:p>
             <a:fld id="{CB233BD1-3BA8-448D-9D08-7846095EA517}" type="datetimeFigureOut">
               <a:rPr lang="en-US" smtClean="0"/>
-              <a:t>5/30/2026</a:t>
+              <a:t>6/3/2026</a:t>
             </a:fld>
             <a:endParaRPr lang="en-US"/>
           </a:p>
@@ -977,7 +977,7 @@
           <a:p>
             <a:fld id="{6383FAE1-13DE-4511-8C1B-C8AFB720664C}" type="datetimeFigureOut">
               <a:rPr lang="en-US" smtClean="0"/>
-              <a:t>5/30/2026</a:t>
+              <a:t>6/3/2026</a:t>
             </a:fld>
             <a:endParaRPr lang="en-US"/>
           </a:p>
@@ -1175,7 +1175,7 @@
           <a:p>
             <a:fld id="{6383FAE1-13DE-4511-8C1B-C8AFB720664C}" type="datetimeFigureOut">
               <a:rPr lang="en-US" smtClean="0"/>
-              <a:t>5/30/2026</a:t>
+              <a:t>6/3/2026</a:t>
             </a:fld>
             <a:endParaRPr lang="en-US"/>
           </a:p>
@@ -1383,7 +1383,7 @@
           <a:p>
             <a:fld id="{6383FAE1-13DE-4511-8C1B-C8AFB720664C}" type="datetimeFigureOut">
               <a:rPr lang="en-US" smtClean="0"/>
-              <a:t>5/30/2026</a:t>
+              <a:t>6/3/2026</a:t>
             </a:fld>
             <a:endParaRPr lang="en-US"/>
           </a:p>
@@ -1581,7 +1581,7 @@
           <a:p>
             <a:fld id="{6383FAE1-13DE-4511-8C1B-C8AFB720664C}" type="datetimeFigureOut">
               <a:rPr lang="en-US" smtClean="0"/>
-              <a:t>5/30/2026</a:t>
+              <a:t>6/3/2026</a:t>
             </a:fld>
             <a:endParaRPr lang="en-US"/>
           </a:p>
@@ -1856,7 +1856,7 @@
           <a:p>
             <a:fld id="{6383FAE1-13DE-4511-8C1B-C8AFB720664C}" type="datetimeFigureOut">
               <a:rPr lang="en-US" smtClean="0"/>
-              <a:t>5/30/2026</a:t>
+              <a:t>6/3/2026</a:t>
             </a:fld>
             <a:endParaRPr lang="en-US"/>
           </a:p>
@@ -2121,7 +2121,7 @@
           <a:p>
             <a:fld id="{6383FAE1-13DE-4511-8C1B-C8AFB720664C}" type="datetimeFigureOut">
               <a:rPr lang="en-US" smtClean="0"/>
-              <a:t>5/30/2026</a:t>
+              <a:t>6/3/2026</a:t>
             </a:fld>
             <a:endParaRPr lang="en-US"/>
           </a:p>
@@ -2533,7 +2533,7 @@
           <a:p>
             <a:fld id="{6383FAE1-13DE-4511-8C1B-C8AFB720664C}" type="datetimeFigureOut">
               <a:rPr lang="en-US" smtClean="0"/>
-              <a:t>5/30/2026</a:t>
+              <a:t>6/3/2026</a:t>
             </a:fld>
             <a:endParaRPr lang="en-US"/>
           </a:p>
@@ -2674,7 +2674,7 @@
           <a:p>
             <a:fld id="{6383FAE1-13DE-4511-8C1B-C8AFB720664C}" type="datetimeFigureOut">
               <a:rPr lang="en-US" smtClean="0"/>
-              <a:t>5/30/2026</a:t>
+              <a:t>6/3/2026</a:t>
             </a:fld>
             <a:endParaRPr lang="en-US"/>
           </a:p>
@@ -2787,7 +2787,7 @@
           <a:p>
             <a:fld id="{6383FAE1-13DE-4511-8C1B-C8AFB720664C}" type="datetimeFigureOut">
               <a:rPr lang="en-US" smtClean="0"/>
-              <a:t>5/30/2026</a:t>
+              <a:t>6/3/2026</a:t>
             </a:fld>
             <a:endParaRPr lang="en-US"/>
           </a:p>
@@ -3098,7 +3098,7 @@
           <a:p>
             <a:fld id="{6383FAE1-13DE-4511-8C1B-C8AFB720664C}" type="datetimeFigureOut">
               <a:rPr lang="en-US" smtClean="0"/>
-              <a:t>5/30/2026</a:t>
+              <a:t>6/3/2026</a:t>
             </a:fld>
             <a:endParaRPr lang="en-US"/>
           </a:p>
@@ -3389,7 +3389,7 @@
           <a:p>
             <a:fld id="{6383FAE1-13DE-4511-8C1B-C8AFB720664C}" type="datetimeFigureOut">
               <a:rPr lang="en-US" smtClean="0"/>
-              <a:t>5/30/2026</a:t>
+              <a:t>6/3/2026</a:t>
             </a:fld>
             <a:endParaRPr lang="en-US"/>
           </a:p>
@@ -3633,7 +3633,7 @@
           <a:p>
             <a:fld id="{6383FAE1-13DE-4511-8C1B-C8AFB720664C}" type="datetimeFigureOut">
               <a:rPr lang="en-US" smtClean="0"/>
-              <a:t>5/30/2026</a:t>
+              <a:t>6/3/2026</a:t>
             </a:fld>
             <a:endParaRPr lang="en-US"/>
           </a:p>
